--- a/Week4/Week4_Slides.pptx
+++ b/Week4/Week4_Slides.pptx
@@ -311,7 +311,7 @@
           <a:p>
             <a:fld id="{8322A558-B964-4799-A94A-632D1601F177}" type="datetimeFigureOut">
               <a:rPr lang="en-IN" smtClean="0"/>
-              <a:t>12-06-2025</a:t>
+              <a:t>02-07-2025</a:t>
             </a:fld>
             <a:endParaRPr lang="en-IN"/>
           </a:p>
@@ -586,7 +586,7 @@
           <a:p>
             <a:fld id="{8322A558-B964-4799-A94A-632D1601F177}" type="datetimeFigureOut">
               <a:rPr lang="en-IN" smtClean="0"/>
-              <a:t>12-06-2025</a:t>
+              <a:t>02-07-2025</a:t>
             </a:fld>
             <a:endParaRPr lang="en-IN"/>
           </a:p>
@@ -780,7 +780,7 @@
           <a:p>
             <a:fld id="{8322A558-B964-4799-A94A-632D1601F177}" type="datetimeFigureOut">
               <a:rPr lang="en-IN" smtClean="0"/>
-              <a:t>12-06-2025</a:t>
+              <a:t>02-07-2025</a:t>
             </a:fld>
             <a:endParaRPr lang="en-IN"/>
           </a:p>
@@ -1053,7 +1053,7 @@
           <a:p>
             <a:fld id="{8322A558-B964-4799-A94A-632D1601F177}" type="datetimeFigureOut">
               <a:rPr lang="en-IN" smtClean="0"/>
-              <a:t>12-06-2025</a:t>
+              <a:t>02-07-2025</a:t>
             </a:fld>
             <a:endParaRPr lang="en-IN"/>
           </a:p>
@@ -1394,7 +1394,7 @@
           <a:p>
             <a:fld id="{8322A558-B964-4799-A94A-632D1601F177}" type="datetimeFigureOut">
               <a:rPr lang="en-IN" smtClean="0"/>
-              <a:t>12-06-2025</a:t>
+              <a:t>02-07-2025</a:t>
             </a:fld>
             <a:endParaRPr lang="en-IN"/>
           </a:p>
@@ -2017,7 +2017,7 @@
           <a:p>
             <a:fld id="{8322A558-B964-4799-A94A-632D1601F177}" type="datetimeFigureOut">
               <a:rPr lang="en-IN" smtClean="0"/>
-              <a:t>12-06-2025</a:t>
+              <a:t>02-07-2025</a:t>
             </a:fld>
             <a:endParaRPr lang="en-IN"/>
           </a:p>
@@ -2877,7 +2877,7 @@
           <a:p>
             <a:fld id="{8322A558-B964-4799-A94A-632D1601F177}" type="datetimeFigureOut">
               <a:rPr lang="en-IN" smtClean="0"/>
-              <a:t>12-06-2025</a:t>
+              <a:t>02-07-2025</a:t>
             </a:fld>
             <a:endParaRPr lang="en-IN"/>
           </a:p>
@@ -3047,7 +3047,7 @@
           <a:p>
             <a:fld id="{8322A558-B964-4799-A94A-632D1601F177}" type="datetimeFigureOut">
               <a:rPr lang="en-IN" smtClean="0"/>
-              <a:t>12-06-2025</a:t>
+              <a:t>02-07-2025</a:t>
             </a:fld>
             <a:endParaRPr lang="en-IN"/>
           </a:p>
@@ -3227,7 +3227,7 @@
           <a:p>
             <a:fld id="{8322A558-B964-4799-A94A-632D1601F177}" type="datetimeFigureOut">
               <a:rPr lang="en-IN" smtClean="0"/>
-              <a:t>12-06-2025</a:t>
+              <a:t>02-07-2025</a:t>
             </a:fld>
             <a:endParaRPr lang="en-IN"/>
           </a:p>
@@ -3397,7 +3397,7 @@
           <a:p>
             <a:fld id="{8322A558-B964-4799-A94A-632D1601F177}" type="datetimeFigureOut">
               <a:rPr lang="en-IN" smtClean="0"/>
-              <a:t>12-06-2025</a:t>
+              <a:t>02-07-2025</a:t>
             </a:fld>
             <a:endParaRPr lang="en-IN"/>
           </a:p>
@@ -3644,7 +3644,7 @@
           <a:p>
             <a:fld id="{8322A558-B964-4799-A94A-632D1601F177}" type="datetimeFigureOut">
               <a:rPr lang="en-IN" smtClean="0"/>
-              <a:t>12-06-2025</a:t>
+              <a:t>02-07-2025</a:t>
             </a:fld>
             <a:endParaRPr lang="en-IN"/>
           </a:p>
@@ -3936,7 +3936,7 @@
           <a:p>
             <a:fld id="{8322A558-B964-4799-A94A-632D1601F177}" type="datetimeFigureOut">
               <a:rPr lang="en-IN" smtClean="0"/>
-              <a:t>12-06-2025</a:t>
+              <a:t>02-07-2025</a:t>
             </a:fld>
             <a:endParaRPr lang="en-IN"/>
           </a:p>
@@ -4380,7 +4380,7 @@
           <a:p>
             <a:fld id="{8322A558-B964-4799-A94A-632D1601F177}" type="datetimeFigureOut">
               <a:rPr lang="en-IN" smtClean="0"/>
-              <a:t>12-06-2025</a:t>
+              <a:t>02-07-2025</a:t>
             </a:fld>
             <a:endParaRPr lang="en-IN"/>
           </a:p>
@@ -4498,7 +4498,7 @@
           <a:p>
             <a:fld id="{8322A558-B964-4799-A94A-632D1601F177}" type="datetimeFigureOut">
               <a:rPr lang="en-IN" smtClean="0"/>
-              <a:t>12-06-2025</a:t>
+              <a:t>02-07-2025</a:t>
             </a:fld>
             <a:endParaRPr lang="en-IN"/>
           </a:p>
@@ -4593,7 +4593,7 @@
           <a:p>
             <a:fld id="{8322A558-B964-4799-A94A-632D1601F177}" type="datetimeFigureOut">
               <a:rPr lang="en-IN" smtClean="0"/>
-              <a:t>12-06-2025</a:t>
+              <a:t>02-07-2025</a:t>
             </a:fld>
             <a:endParaRPr lang="en-IN"/>
           </a:p>
@@ -4872,7 +4872,7 @@
           <a:p>
             <a:fld id="{8322A558-B964-4799-A94A-632D1601F177}" type="datetimeFigureOut">
               <a:rPr lang="en-IN" smtClean="0"/>
-              <a:t>12-06-2025</a:t>
+              <a:t>02-07-2025</a:t>
             </a:fld>
             <a:endParaRPr lang="en-IN"/>
           </a:p>
@@ -5147,7 +5147,7 @@
           <a:p>
             <a:fld id="{8322A558-B964-4799-A94A-632D1601F177}" type="datetimeFigureOut">
               <a:rPr lang="en-IN" smtClean="0"/>
-              <a:t>12-06-2025</a:t>
+              <a:t>02-07-2025</a:t>
             </a:fld>
             <a:endParaRPr lang="en-IN"/>
           </a:p>
@@ -5576,7 +5576,7 @@
           <a:p>
             <a:fld id="{8322A558-B964-4799-A94A-632D1601F177}" type="datetimeFigureOut">
               <a:rPr lang="en-IN" smtClean="0"/>
-              <a:t>12-06-2025</a:t>
+              <a:t>02-07-2025</a:t>
             </a:fld>
             <a:endParaRPr lang="en-IN"/>
           </a:p>
@@ -6981,6 +6981,135 @@
           </a:p>
         </p:txBody>
       </p:sp>
+      <p:sp>
+        <p:nvSpPr>
+          <p:cNvPr id="4" name="TextBox 3">
+            <a:extLst>
+              <a:ext uri="{FF2B5EF4-FFF2-40B4-BE49-F238E27FC236}">
+                <a16:creationId xmlns:a16="http://schemas.microsoft.com/office/drawing/2014/main" id="{FA913225-BB86-9D04-9B59-A5EB56004DB2}"/>
+              </a:ext>
+            </a:extLst>
+          </p:cNvPr>
+          <p:cNvSpPr txBox="1"/>
+          <p:nvPr/>
+        </p:nvSpPr>
+        <p:spPr>
+          <a:xfrm>
+            <a:off x="646111" y="6448069"/>
+            <a:ext cx="5925020" cy="369332"/>
+          </a:xfrm>
+          <a:prstGeom prst="rect">
+            <a:avLst/>
+          </a:prstGeom>
+          <a:noFill/>
+        </p:spPr>
+        <p:txBody>
+          <a:bodyPr wrap="none" rtlCol="0">
+            <a:spAutoFit/>
+          </a:bodyPr>
+          <a:lstStyle>
+            <a:defPPr>
+              <a:defRPr lang="en-US"/>
+            </a:defPPr>
+            <a:lvl1pPr marL="0" algn="l" defTabSz="457200" rtl="0" eaLnBrk="1" latinLnBrk="0" hangingPunct="1">
+              <a:defRPr sz="1800" kern="1200">
+                <a:solidFill>
+                  <a:schemeClr val="tx1"/>
+                </a:solidFill>
+                <a:latin typeface="+mn-lt"/>
+                <a:ea typeface="+mn-ea"/>
+                <a:cs typeface="+mn-cs"/>
+              </a:defRPr>
+            </a:lvl1pPr>
+            <a:lvl2pPr marL="457200" algn="l" defTabSz="457200" rtl="0" eaLnBrk="1" latinLnBrk="0" hangingPunct="1">
+              <a:defRPr sz="1800" kern="1200">
+                <a:solidFill>
+                  <a:schemeClr val="tx1"/>
+                </a:solidFill>
+                <a:latin typeface="+mn-lt"/>
+                <a:ea typeface="+mn-ea"/>
+                <a:cs typeface="+mn-cs"/>
+              </a:defRPr>
+            </a:lvl2pPr>
+            <a:lvl3pPr marL="914400" algn="l" defTabSz="457200" rtl="0" eaLnBrk="1" latinLnBrk="0" hangingPunct="1">
+              <a:defRPr sz="1800" kern="1200">
+                <a:solidFill>
+                  <a:schemeClr val="tx1"/>
+                </a:solidFill>
+                <a:latin typeface="+mn-lt"/>
+                <a:ea typeface="+mn-ea"/>
+                <a:cs typeface="+mn-cs"/>
+              </a:defRPr>
+            </a:lvl3pPr>
+            <a:lvl4pPr marL="1371600" algn="l" defTabSz="457200" rtl="0" eaLnBrk="1" latinLnBrk="0" hangingPunct="1">
+              <a:defRPr sz="1800" kern="1200">
+                <a:solidFill>
+                  <a:schemeClr val="tx1"/>
+                </a:solidFill>
+                <a:latin typeface="+mn-lt"/>
+                <a:ea typeface="+mn-ea"/>
+                <a:cs typeface="+mn-cs"/>
+              </a:defRPr>
+            </a:lvl4pPr>
+            <a:lvl5pPr marL="1828800" algn="l" defTabSz="457200" rtl="0" eaLnBrk="1" latinLnBrk="0" hangingPunct="1">
+              <a:defRPr sz="1800" kern="1200">
+                <a:solidFill>
+                  <a:schemeClr val="tx1"/>
+                </a:solidFill>
+                <a:latin typeface="+mn-lt"/>
+                <a:ea typeface="+mn-ea"/>
+                <a:cs typeface="+mn-cs"/>
+              </a:defRPr>
+            </a:lvl5pPr>
+            <a:lvl6pPr marL="2286000" algn="l" defTabSz="457200" rtl="0" eaLnBrk="1" latinLnBrk="0" hangingPunct="1">
+              <a:defRPr sz="1800" kern="1200">
+                <a:solidFill>
+                  <a:schemeClr val="tx1"/>
+                </a:solidFill>
+                <a:latin typeface="+mn-lt"/>
+                <a:ea typeface="+mn-ea"/>
+                <a:cs typeface="+mn-cs"/>
+              </a:defRPr>
+            </a:lvl6pPr>
+            <a:lvl7pPr marL="2743200" algn="l" defTabSz="457200" rtl="0" eaLnBrk="1" latinLnBrk="0" hangingPunct="1">
+              <a:defRPr sz="1800" kern="1200">
+                <a:solidFill>
+                  <a:schemeClr val="tx1"/>
+                </a:solidFill>
+                <a:latin typeface="+mn-lt"/>
+                <a:ea typeface="+mn-ea"/>
+                <a:cs typeface="+mn-cs"/>
+              </a:defRPr>
+            </a:lvl7pPr>
+            <a:lvl8pPr marL="3200400" algn="l" defTabSz="457200" rtl="0" eaLnBrk="1" latinLnBrk="0" hangingPunct="1">
+              <a:defRPr sz="1800" kern="1200">
+                <a:solidFill>
+                  <a:schemeClr val="tx1"/>
+                </a:solidFill>
+                <a:latin typeface="+mn-lt"/>
+                <a:ea typeface="+mn-ea"/>
+                <a:cs typeface="+mn-cs"/>
+              </a:defRPr>
+            </a:lvl8pPr>
+            <a:lvl9pPr marL="3657600" algn="l" defTabSz="457200" rtl="0" eaLnBrk="1" latinLnBrk="0" hangingPunct="1">
+              <a:defRPr sz="1800" kern="1200">
+                <a:solidFill>
+                  <a:schemeClr val="tx1"/>
+                </a:solidFill>
+                <a:latin typeface="+mn-lt"/>
+                <a:ea typeface="+mn-ea"/>
+                <a:cs typeface="+mn-cs"/>
+              </a:defRPr>
+            </a:lvl9pPr>
+          </a:lstStyle>
+          <a:p>
+            <a:r>
+              <a:rPr lang="en-IN" dirty="0"/>
+              <a:t>Disclaimer – For course use only; do not redistribute.</a:t>
+            </a:r>
+          </a:p>
+        </p:txBody>
+      </p:sp>
     </p:spTree>
     <p:extLst>
       <p:ext uri="{BB962C8B-B14F-4D97-AF65-F5344CB8AC3E}">
